--- a/docs/Poster_Propension_Bicicletas.pptx
+++ b/docs/Poster_Propension_Bicicletas.pptx
@@ -3090,7 +3090,7 @@
       <p:grpSpPr/>
       <p:pic>
         <p:nvPicPr>
-          <p:cNvPr id="2" name="Picture 1" descr="poster.png"/>
+          <p:cNvPr id="2" name="Picture 1" descr="poster2.png"/>
           <p:cNvPicPr>
             <a:picLocks noChangeAspect="1"/>
           </p:cNvPicPr>
